--- a/docs/AMV.pptx
+++ b/docs/AMV.pptx
@@ -237,6 +237,13 @@
             <a:schemeClr val="lt1"/>
           </a:fontRef>
         </p:style>
+        <p:txBody>
+          <a:bodyPr/>
+          <a:lstStyle/>
+          <a:p>
+            <a:endParaRPr lang="hu-HU"/>
+          </a:p>
+        </p:txBody>
       </p:sp>
       <p:sp>
         <p:nvSpPr>
@@ -275,6 +282,13 @@
             <a:schemeClr val="lt1"/>
           </a:fontRef>
         </p:style>
+        <p:txBody>
+          <a:bodyPr/>
+          <a:lstStyle/>
+          <a:p>
+            <a:endParaRPr lang="hu-HU"/>
+          </a:p>
+        </p:txBody>
       </p:sp>
       <p:sp>
         <p:nvSpPr>
@@ -394,7 +408,7 @@
           <a:p>
             <a:fld id="{27ADA887-842A-4CAE-8A19-19A134C9804C}" type="datetimeFigureOut">
               <a:rPr lang="hu-HU" smtClean="0"/>
-              <a:t>2025. 12. 17.</a:t>
+              <a:t>2025. 12. 18.</a:t>
             </a:fld>
             <a:endParaRPr lang="hu-HU"/>
           </a:p>
@@ -808,7 +822,7 @@
           <a:p>
             <a:fld id="{27ADA887-842A-4CAE-8A19-19A134C9804C}" type="datetimeFigureOut">
               <a:rPr lang="hu-HU" smtClean="0"/>
-              <a:t>2025. 12. 17.</a:t>
+              <a:t>2025. 12. 18.</a:t>
             </a:fld>
             <a:endParaRPr lang="hu-HU"/>
           </a:p>
@@ -1144,7 +1158,7 @@
           <a:p>
             <a:fld id="{27ADA887-842A-4CAE-8A19-19A134C9804C}" type="datetimeFigureOut">
               <a:rPr lang="hu-HU" smtClean="0"/>
-              <a:t>2025. 12. 17.</a:t>
+              <a:t>2025. 12. 18.</a:t>
             </a:fld>
             <a:endParaRPr lang="hu-HU"/>
           </a:p>
@@ -1549,7 +1563,7 @@
           <a:p>
             <a:fld id="{27ADA887-842A-4CAE-8A19-19A134C9804C}" type="datetimeFigureOut">
               <a:rPr lang="hu-HU" smtClean="0"/>
-              <a:t>2025. 12. 17.</a:t>
+              <a:t>2025. 12. 18.</a:t>
             </a:fld>
             <a:endParaRPr lang="hu-HU"/>
           </a:p>
@@ -2117,7 +2131,7 @@
           <a:p>
             <a:fld id="{27ADA887-842A-4CAE-8A19-19A134C9804C}" type="datetimeFigureOut">
               <a:rPr lang="hu-HU" smtClean="0"/>
-              <a:t>2025. 12. 17.</a:t>
+              <a:t>2025. 12. 18.</a:t>
             </a:fld>
             <a:endParaRPr lang="hu-HU"/>
           </a:p>
@@ -2798,7 +2812,7 @@
           <a:p>
             <a:fld id="{27ADA887-842A-4CAE-8A19-19A134C9804C}" type="datetimeFigureOut">
               <a:rPr lang="hu-HU" smtClean="0"/>
-              <a:t>2025. 12. 17.</a:t>
+              <a:t>2025. 12. 18.</a:t>
             </a:fld>
             <a:endParaRPr lang="hu-HU"/>
           </a:p>
@@ -3711,7 +3725,7 @@
           <a:p>
             <a:fld id="{27ADA887-842A-4CAE-8A19-19A134C9804C}" type="datetimeFigureOut">
               <a:rPr lang="hu-HU" smtClean="0"/>
-              <a:t>2025. 12. 17.</a:t>
+              <a:t>2025. 12. 18.</a:t>
             </a:fld>
             <a:endParaRPr lang="hu-HU"/>
           </a:p>
@@ -4024,7 +4038,7 @@
           <a:p>
             <a:fld id="{27ADA887-842A-4CAE-8A19-19A134C9804C}" type="datetimeFigureOut">
               <a:rPr lang="hu-HU" smtClean="0"/>
-              <a:t>2025. 12. 17.</a:t>
+              <a:t>2025. 12. 18.</a:t>
             </a:fld>
             <a:endParaRPr lang="hu-HU"/>
           </a:p>
@@ -4288,7 +4302,7 @@
           <a:p>
             <a:fld id="{27ADA887-842A-4CAE-8A19-19A134C9804C}" type="datetimeFigureOut">
               <a:rPr lang="hu-HU" smtClean="0"/>
-              <a:t>2025. 12. 17.</a:t>
+              <a:t>2025. 12. 18.</a:t>
             </a:fld>
             <a:endParaRPr lang="hu-HU"/>
           </a:p>
@@ -4629,7 +4643,7 @@
           <a:p>
             <a:fld id="{27ADA887-842A-4CAE-8A19-19A134C9804C}" type="datetimeFigureOut">
               <a:rPr lang="hu-HU" smtClean="0"/>
-              <a:t>2025. 12. 17.</a:t>
+              <a:t>2025. 12. 18.</a:t>
             </a:fld>
             <a:endParaRPr lang="hu-HU"/>
           </a:p>
@@ -5018,7 +5032,7 @@
           <a:p>
             <a:fld id="{27ADA887-842A-4CAE-8A19-19A134C9804C}" type="datetimeFigureOut">
               <a:rPr lang="hu-HU" smtClean="0"/>
-              <a:t>2025. 12. 17.</a:t>
+              <a:t>2025. 12. 18.</a:t>
             </a:fld>
             <a:endParaRPr lang="hu-HU"/>
           </a:p>
@@ -5394,7 +5408,7 @@
           <a:p>
             <a:fld id="{27ADA887-842A-4CAE-8A19-19A134C9804C}" type="datetimeFigureOut">
               <a:rPr lang="hu-HU" smtClean="0"/>
-              <a:t>2025. 12. 17.</a:t>
+              <a:t>2025. 12. 18.</a:t>
             </a:fld>
             <a:endParaRPr lang="hu-HU"/>
           </a:p>
@@ -5900,7 +5914,7 @@
           <a:p>
             <a:fld id="{27ADA887-842A-4CAE-8A19-19A134C9804C}" type="datetimeFigureOut">
               <a:rPr lang="hu-HU" smtClean="0"/>
-              <a:t>2025. 12. 17.</a:t>
+              <a:t>2025. 12. 18.</a:t>
             </a:fld>
             <a:endParaRPr lang="hu-HU"/>
           </a:p>
@@ -6157,7 +6171,7 @@
           <a:p>
             <a:fld id="{27ADA887-842A-4CAE-8A19-19A134C9804C}" type="datetimeFigureOut">
               <a:rPr lang="hu-HU" smtClean="0"/>
-              <a:t>2025. 12. 17.</a:t>
+              <a:t>2025. 12. 18.</a:t>
             </a:fld>
             <a:endParaRPr lang="hu-HU"/>
           </a:p>
@@ -6320,7 +6334,7 @@
           <a:p>
             <a:fld id="{27ADA887-842A-4CAE-8A19-19A134C9804C}" type="datetimeFigureOut">
               <a:rPr lang="hu-HU" smtClean="0"/>
-              <a:t>2025. 12. 17.</a:t>
+              <a:t>2025. 12. 18.</a:t>
             </a:fld>
             <a:endParaRPr lang="hu-HU"/>
           </a:p>
@@ -6710,7 +6724,7 @@
           <a:p>
             <a:fld id="{27ADA887-842A-4CAE-8A19-19A134C9804C}" type="datetimeFigureOut">
               <a:rPr lang="hu-HU" smtClean="0"/>
-              <a:t>2025. 12. 17.</a:t>
+              <a:t>2025. 12. 18.</a:t>
             </a:fld>
             <a:endParaRPr lang="hu-HU"/>
           </a:p>
@@ -7119,7 +7133,7 @@
           <a:p>
             <a:fld id="{27ADA887-842A-4CAE-8A19-19A134C9804C}" type="datetimeFigureOut">
               <a:rPr lang="hu-HU" smtClean="0"/>
-              <a:t>2025. 12. 17.</a:t>
+              <a:t>2025. 12. 18.</a:t>
             </a:fld>
             <a:endParaRPr lang="hu-HU"/>
           </a:p>
@@ -7363,7 +7377,7 @@
           <a:p>
             <a:fld id="{27ADA887-842A-4CAE-8A19-19A134C9804C}" type="datetimeFigureOut">
               <a:rPr lang="hu-HU" smtClean="0"/>
-              <a:t>2025. 12. 17.</a:t>
+              <a:t>2025. 12. 18.</a:t>
             </a:fld>
             <a:endParaRPr lang="hu-HU"/>
           </a:p>
@@ -7919,13 +7933,13 @@
   <p:clrMapOvr>
     <a:masterClrMapping/>
   </p:clrMapOvr>
-  <mc:AlternateContent xmlns:mc="http://schemas.openxmlformats.org/markup-compatibility/2006">
-    <mc:Choice xmlns:p14="http://schemas.microsoft.com/office/powerpoint/2010/main" Requires="p14">
+  <mc:AlternateContent xmlns:mc="http://schemas.openxmlformats.org/markup-compatibility/2006" xmlns:p14="http://schemas.microsoft.com/office/powerpoint/2010/main">
+    <mc:Choice Requires="p14">
       <p:transition spd="med" p14:dur="700">
         <p:fade/>
       </p:transition>
     </mc:Choice>
-    <mc:Fallback>
+    <mc:Fallback xmlns="">
       <p:transition spd="med">
         <p:fade/>
       </p:transition>
@@ -8039,13 +8053,13 @@
   <p:clrMapOvr>
     <a:masterClrMapping/>
   </p:clrMapOvr>
-  <mc:AlternateContent xmlns:mc="http://schemas.openxmlformats.org/markup-compatibility/2006">
-    <mc:Choice xmlns:p14="http://schemas.microsoft.com/office/powerpoint/2010/main" Requires="p14">
+  <mc:AlternateContent xmlns:mc="http://schemas.openxmlformats.org/markup-compatibility/2006" xmlns:p14="http://schemas.microsoft.com/office/powerpoint/2010/main">
+    <mc:Choice Requires="p14">
       <p:transition spd="med" p14:dur="700">
         <p:fade/>
       </p:transition>
     </mc:Choice>
-    <mc:Fallback>
+    <mc:Fallback xmlns="">
       <p:transition spd="med">
         <p:fade/>
       </p:transition>
@@ -8278,13 +8292,13 @@
   <p:clrMapOvr>
     <a:masterClrMapping/>
   </p:clrMapOvr>
-  <mc:AlternateContent xmlns:mc="http://schemas.openxmlformats.org/markup-compatibility/2006">
-    <mc:Choice xmlns:p14="http://schemas.microsoft.com/office/powerpoint/2010/main" Requires="p14">
+  <mc:AlternateContent xmlns:mc="http://schemas.openxmlformats.org/markup-compatibility/2006" xmlns:p14="http://schemas.microsoft.com/office/powerpoint/2010/main">
+    <mc:Choice Requires="p14">
       <p:transition spd="med" p14:dur="700">
         <p:fade/>
       </p:transition>
     </mc:Choice>
-    <mc:Fallback>
+    <mc:Fallback xmlns="">
       <p:transition spd="med">
         <p:fade/>
       </p:transition>
@@ -8410,13 +8424,13 @@
   <p:clrMapOvr>
     <a:masterClrMapping/>
   </p:clrMapOvr>
-  <mc:AlternateContent xmlns:mc="http://schemas.openxmlformats.org/markup-compatibility/2006">
-    <mc:Choice xmlns:p14="http://schemas.microsoft.com/office/powerpoint/2010/main" Requires="p14">
+  <mc:AlternateContent xmlns:mc="http://schemas.openxmlformats.org/markup-compatibility/2006" xmlns:p14="http://schemas.microsoft.com/office/powerpoint/2010/main">
+    <mc:Choice Requires="p14">
       <p:transition spd="med" p14:dur="700">
         <p:fade/>
       </p:transition>
     </mc:Choice>
-    <mc:Fallback>
+    <mc:Fallback xmlns="">
       <p:transition spd="med">
         <p:fade/>
       </p:transition>
@@ -8486,9 +8500,16 @@
             <p:ph idx="1"/>
           </p:nvPr>
         </p:nvSpPr>
-        <p:spPr/>
-        <p:txBody>
-          <a:bodyPr/>
+        <p:spPr>
+          <a:xfrm>
+            <a:off x="680321" y="2336872"/>
+            <a:ext cx="9613861" cy="4165527"/>
+          </a:xfrm>
+        </p:spPr>
+        <p:txBody>
+          <a:bodyPr>
+            <a:normAutofit/>
+          </a:bodyPr>
           <a:lstStyle/>
           <a:p>
             <a:r>
@@ -8545,6 +8566,49 @@
             <a:r>
               <a:rPr lang="hu-HU" dirty="0"/>
               <a:t>Train_metadata.csv – metaadatok </a:t>
+            </a:r>
+          </a:p>
+          <a:p>
+            <a:r>
+              <a:rPr lang="hu-HU" dirty="0"/>
+              <a:t>Feldolgozás:</a:t>
+            </a:r>
+          </a:p>
+          <a:p>
+            <a:pPr lvl="1"/>
+            <a:r>
+              <a:rPr lang="hu-HU" dirty="0"/>
+              <a:t>15 másodperces darabok</a:t>
+            </a:r>
+          </a:p>
+          <a:p>
+            <a:pPr lvl="1"/>
+            <a:r>
+              <a:rPr lang="hu-HU" dirty="0" err="1"/>
+              <a:t>Mel</a:t>
+            </a:r>
+            <a:r>
+              <a:rPr lang="hu-HU" dirty="0"/>
+              <a:t>-skálázott </a:t>
+            </a:r>
+            <a:r>
+              <a:rPr lang="hu-HU" dirty="0" err="1"/>
+              <a:t>spektrogram</a:t>
+            </a:r>
+            <a:r>
+              <a:rPr lang="hu-HU" dirty="0"/>
+              <a:t> </a:t>
+            </a:r>
+            <a:r>
+              <a:rPr lang="hu-HU"/>
+              <a:t>(emberi hallás)</a:t>
+            </a:r>
+            <a:endParaRPr lang="hu-HU" dirty="0"/>
+          </a:p>
+          <a:p>
+            <a:r>
+              <a:rPr lang="hu-HU" dirty="0"/>
+              <a:t>Végül képfelismerési probléma</a:t>
             </a:r>
           </a:p>
           <a:p>
@@ -8593,13 +8657,13 @@
   <p:clrMapOvr>
     <a:masterClrMapping/>
   </p:clrMapOvr>
-  <mc:AlternateContent xmlns:mc="http://schemas.openxmlformats.org/markup-compatibility/2006">
-    <mc:Choice xmlns:p14="http://schemas.microsoft.com/office/powerpoint/2010/main" Requires="p14">
+  <mc:AlternateContent xmlns:mc="http://schemas.openxmlformats.org/markup-compatibility/2006" xmlns:p14="http://schemas.microsoft.com/office/powerpoint/2010/main">
+    <mc:Choice Requires="p14">
       <p:transition spd="med" p14:dur="700">
         <p:fade/>
       </p:transition>
     </mc:Choice>
-    <mc:Fallback>
+    <mc:Fallback xmlns="">
       <p:transition spd="med">
         <p:fade/>
       </p:transition>
@@ -8845,13 +8909,13 @@
   <p:clrMapOvr>
     <a:masterClrMapping/>
   </p:clrMapOvr>
-  <mc:AlternateContent xmlns:mc="http://schemas.openxmlformats.org/markup-compatibility/2006">
-    <mc:Choice xmlns:p14="http://schemas.microsoft.com/office/powerpoint/2010/main" Requires="p14">
+  <mc:AlternateContent xmlns:mc="http://schemas.openxmlformats.org/markup-compatibility/2006" xmlns:p14="http://schemas.microsoft.com/office/powerpoint/2010/main">
+    <mc:Choice Requires="p14">
       <p:transition spd="med" p14:dur="700">
         <p:fade/>
       </p:transition>
     </mc:Choice>
-    <mc:Fallback>
+    <mc:Fallback xmlns="">
       <p:transition spd="med">
         <p:fade/>
       </p:transition>
@@ -9060,13 +9124,13 @@
   <p:clrMapOvr>
     <a:masterClrMapping/>
   </p:clrMapOvr>
-  <mc:AlternateContent xmlns:mc="http://schemas.openxmlformats.org/markup-compatibility/2006">
-    <mc:Choice xmlns:p14="http://schemas.microsoft.com/office/powerpoint/2010/main" Requires="p14">
+  <mc:AlternateContent xmlns:mc="http://schemas.openxmlformats.org/markup-compatibility/2006" xmlns:p14="http://schemas.microsoft.com/office/powerpoint/2010/main">
+    <mc:Choice Requires="p14">
       <p:transition spd="med" p14:dur="700">
         <p:fade/>
       </p:transition>
     </mc:Choice>
-    <mc:Fallback>
+    <mc:Fallback xmlns="">
       <p:transition spd="med">
         <p:fade/>
       </p:transition>
@@ -9229,13 +9293,13 @@
   <p:clrMapOvr>
     <a:masterClrMapping/>
   </p:clrMapOvr>
-  <mc:AlternateContent xmlns:mc="http://schemas.openxmlformats.org/markup-compatibility/2006">
-    <mc:Choice xmlns:p14="http://schemas.microsoft.com/office/powerpoint/2010/main" Requires="p14">
+  <mc:AlternateContent xmlns:mc="http://schemas.openxmlformats.org/markup-compatibility/2006" xmlns:p14="http://schemas.microsoft.com/office/powerpoint/2010/main">
+    <mc:Choice Requires="p14">
       <p:transition spd="med" p14:dur="700">
         <p:fade/>
       </p:transition>
     </mc:Choice>
-    <mc:Fallback>
+    <mc:Fallback xmlns="">
       <p:transition spd="med">
         <p:fade/>
       </p:transition>
@@ -9324,13 +9388,13 @@
   <p:clrMapOvr>
     <a:masterClrMapping/>
   </p:clrMapOvr>
-  <mc:AlternateContent xmlns:mc="http://schemas.openxmlformats.org/markup-compatibility/2006">
-    <mc:Choice xmlns:p14="http://schemas.microsoft.com/office/powerpoint/2010/main" Requires="p14">
+  <mc:AlternateContent xmlns:mc="http://schemas.openxmlformats.org/markup-compatibility/2006" xmlns:p14="http://schemas.microsoft.com/office/powerpoint/2010/main">
+    <mc:Choice Requires="p14">
       <p:transition spd="med" p14:dur="700">
         <p:fade/>
       </p:transition>
     </mc:Choice>
-    <mc:Fallback>
+    <mc:Fallback xmlns="">
       <p:transition spd="med">
         <p:fade/>
       </p:transition>

--- a/docs/AMV.pptx
+++ b/docs/AMV.pptx
@@ -7965,6 +7965,53 @@
           <a:chExt cx="0" cy="0"/>
         </a:xfrm>
       </p:grpSpPr>
+      <p:pic>
+        <p:nvPicPr>
+          <p:cNvPr id="1026" name="Picture 2" descr="FLY201: An overview of brown flycatchers in Muscicapidae – Birds of  Singapore">
+            <a:extLst>
+              <a:ext uri="{FF2B5EF4-FFF2-40B4-BE49-F238E27FC236}">
+                <a16:creationId xmlns:a16="http://schemas.microsoft.com/office/drawing/2014/main" id="{2C3D0109-F656-613C-7F14-E8C8AD76AFEB}"/>
+              </a:ext>
+            </a:extLst>
+          </p:cNvPr>
+          <p:cNvPicPr>
+            <a:picLocks noChangeAspect="1" noChangeArrowheads="1"/>
+          </p:cNvPicPr>
+          <p:nvPr/>
+        </p:nvPicPr>
+        <p:blipFill rotWithShape="1">
+          <a:blip r:embed="rId4">
+            <a:extLst>
+              <a:ext uri="{28A0092B-C50C-407E-A947-70E740481C1C}">
+                <a14:useLocalDpi xmlns:a14="http://schemas.microsoft.com/office/drawing/2010/main" val="0"/>
+              </a:ext>
+            </a:extLst>
+          </a:blip>
+          <a:srcRect t="18712"/>
+          <a:stretch>
+            <a:fillRect/>
+          </a:stretch>
+        </p:blipFill>
+        <p:spPr bwMode="auto">
+          <a:xfrm>
+            <a:off x="1897818" y="4136531"/>
+            <a:ext cx="4544292" cy="2462646"/>
+          </a:xfrm>
+          <a:prstGeom prst="rect">
+            <a:avLst/>
+          </a:prstGeom>
+          <a:noFill/>
+          <a:extLst>
+            <a:ext uri="{909E8E84-426E-40DD-AFC4-6F175D3DCCD1}">
+              <a14:hiddenFill xmlns:a14="http://schemas.microsoft.com/office/drawing/2010/main">
+                <a:solidFill>
+                  <a:srgbClr val="FFFFFF"/>
+                </a:solidFill>
+              </a14:hiddenFill>
+            </a:ext>
+          </a:extLst>
+        </p:spPr>
+      </p:pic>
       <p:sp>
         <p:nvSpPr>
           <p:cNvPr id="2" name="Cím 1">
@@ -8016,17 +8063,7 @@
           <a:p>
             <a:r>
               <a:rPr lang="hu-HU" dirty="0"/>
-              <a:t>Cél: madárfajok azonosítása hangfelvételek alapján </a:t>
-            </a:r>
-            <a:r>
-              <a:rPr lang="hu-HU" dirty="0">
-                <a:sym typeface="Wingdings" panose="05000000000000000000" pitchFamily="2" charset="2"/>
-              </a:rPr>
-              <a:t> é</a:t>
-            </a:r>
-            <a:r>
-              <a:rPr lang="hu-HU" dirty="0"/>
-              <a:t>lővilág monitorozása</a:t>
+              <a:t>Cél: madárfajok azonosítása hangfelvételek alapján</a:t>
             </a:r>
           </a:p>
           <a:p>
@@ -8043,6 +8080,44 @@
           </a:p>
         </p:txBody>
       </p:sp>
+      <p:pic>
+        <p:nvPicPr>
+          <p:cNvPr id="4" name="XC49755">
+            <a:hlinkClick r:id="" action="ppaction://media"/>
+            <a:extLst>
+              <a:ext uri="{FF2B5EF4-FFF2-40B4-BE49-F238E27FC236}">
+                <a16:creationId xmlns:a16="http://schemas.microsoft.com/office/drawing/2014/main" id="{42A8D071-E12C-01EE-3C38-0DFDC553A6CF}"/>
+              </a:ext>
+            </a:extLst>
+          </p:cNvPr>
+          <p:cNvPicPr>
+            <a:picLocks noChangeAspect="1"/>
+          </p:cNvPicPr>
+          <p:nvPr>
+            <a:audioFile r:link="rId2"/>
+            <p:extLst>
+              <p:ext uri="{DAA4B4D4-6D71-4841-9C94-3DE7FCFB9230}">
+                <p14:media xmlns:p14="http://schemas.microsoft.com/office/powerpoint/2010/main" r:embed="rId1"/>
+              </p:ext>
+            </p:extLst>
+          </p:nvPr>
+        </p:nvPicPr>
+        <p:blipFill>
+          <a:blip r:embed="rId5"/>
+          <a:stretch>
+            <a:fillRect/>
+          </a:stretch>
+        </p:blipFill>
+        <p:spPr>
+          <a:xfrm>
+            <a:off x="7503697" y="4330350"/>
+            <a:ext cx="2075007" cy="2075007"/>
+          </a:xfrm>
+          <a:prstGeom prst="rect">
+            <a:avLst/>
+          </a:prstGeom>
+        </p:spPr>
+      </p:pic>
     </p:spTree>
     <p:extLst>
       <p:ext uri="{BB962C8B-B14F-4D97-AF65-F5344CB8AC3E}">
@@ -8065,6 +8140,90 @@
       </p:transition>
     </mc:Fallback>
   </mc:AlternateContent>
+  <p:timing>
+    <p:tnLst>
+      <p:par>
+        <p:cTn id="1" dur="indefinite" restart="never" nodeType="tmRoot">
+          <p:childTnLst>
+            <p:seq concurrent="1" nextAc="seek">
+              <p:cTn id="2" dur="indefinite" nodeType="mainSeq">
+                <p:childTnLst>
+                  <p:par>
+                    <p:cTn id="3" fill="hold">
+                      <p:stCondLst>
+                        <p:cond delay="indefinite"/>
+                      </p:stCondLst>
+                      <p:childTnLst>
+                        <p:par>
+                          <p:cTn id="4" fill="hold">
+                            <p:stCondLst>
+                              <p:cond delay="0"/>
+                            </p:stCondLst>
+                            <p:childTnLst>
+                              <p:par>
+                                <p:cTn id="5" presetID="1" presetClass="mediacall" presetSubtype="0" fill="hold" nodeType="clickEffect">
+                                  <p:stCondLst>
+                                    <p:cond delay="0"/>
+                                  </p:stCondLst>
+                                  <p:childTnLst>
+                                    <p:cmd type="call" cmd="playFrom(0.0)">
+                                      <p:cBhvr>
+                                        <p:cTn id="6" dur="52812" fill="hold"/>
+                                        <p:tgtEl>
+                                          <p:spTgt spid="4"/>
+                                        </p:tgtEl>
+                                      </p:cBhvr>
+                                    </p:cmd>
+                                  </p:childTnLst>
+                                </p:cTn>
+                              </p:par>
+                            </p:childTnLst>
+                          </p:cTn>
+                        </p:par>
+                      </p:childTnLst>
+                    </p:cTn>
+                  </p:par>
+                </p:childTnLst>
+              </p:cTn>
+              <p:prevCondLst>
+                <p:cond evt="onPrev" delay="0">
+                  <p:tgtEl>
+                    <p:sldTgt/>
+                  </p:tgtEl>
+                </p:cond>
+              </p:prevCondLst>
+              <p:nextCondLst>
+                <p:cond evt="onNext" delay="0">
+                  <p:tgtEl>
+                    <p:sldTgt/>
+                  </p:tgtEl>
+                </p:cond>
+              </p:nextCondLst>
+            </p:seq>
+            <p:audio>
+              <p:cMediaNode vol="80000">
+                <p:cTn id="7" fill="hold" display="0">
+                  <p:stCondLst>
+                    <p:cond delay="indefinite"/>
+                  </p:stCondLst>
+                  <p:endCondLst>
+                    <p:cond evt="onStopAudio" delay="0">
+                      <p:tgtEl>
+                        <p:sldTgt/>
+                      </p:tgtEl>
+                    </p:cond>
+                  </p:endCondLst>
+                </p:cTn>
+                <p:tgtEl>
+                  <p:spTgt spid="4"/>
+                </p:tgtEl>
+              </p:cMediaNode>
+            </p:audio>
+          </p:childTnLst>
+        </p:cTn>
+      </p:par>
+    </p:tnLst>
+  </p:timing>
 </p:sld>
 </file>
 
@@ -8138,7 +8297,7 @@
           <a:p>
             <a:r>
               <a:rPr lang="hu-HU" dirty="0"/>
-              <a:t>Manuálisan előállított akusztikai jellemzők alapján</a:t>
+              <a:t>Manuálisan előállított akusztikai jellemzők alapján (gépi tanulás)</a:t>
             </a:r>
           </a:p>
           <a:p>
@@ -8201,18 +8360,6 @@
                 <a:sym typeface="Wingdings" panose="05000000000000000000" pitchFamily="2" charset="2"/>
               </a:rPr>
               <a:t>Módszerek: </a:t>
-            </a:r>
-            <a:r>
-              <a:rPr lang="hu-HU" dirty="0" err="1">
-                <a:sym typeface="Wingdings" panose="05000000000000000000" pitchFamily="2" charset="2"/>
-              </a:rPr>
-              <a:t>ensemble</a:t>
-            </a:r>
-            <a:r>
-              <a:rPr lang="hu-HU" dirty="0">
-                <a:sym typeface="Wingdings" panose="05000000000000000000" pitchFamily="2" charset="2"/>
-              </a:rPr>
-              <a:t>, </a:t>
             </a:r>
             <a:r>
               <a:rPr lang="hu-HU" dirty="0" err="1">
@@ -8375,6 +8522,12 @@
           <a:p>
             <a:r>
               <a:rPr lang="hu-HU" dirty="0"/>
+              <a:t>Adatok beolvasása Google Drive segítségével</a:t>
+            </a:r>
+          </a:p>
+          <a:p>
+            <a:r>
+              <a:rPr lang="hu-HU" dirty="0"/>
               <a:t>Hangfelvételek metaadatokkal (címkézett adatok)</a:t>
             </a:r>
           </a:p>
@@ -8391,8 +8544,21 @@
           <a:p>
             <a:r>
               <a:rPr lang="hu-HU" dirty="0"/>
-              <a:t>CNN alapú architektúra (EfficientNetV2)</a:t>
-            </a:r>
+              <a:t>CNN alapú architektúra (EfficientNetV2) - </a:t>
+            </a:r>
+            <a:r>
+              <a:rPr lang="hu-HU" dirty="0" err="1"/>
+              <a:t>Tensorflow</a:t>
+            </a:r>
+            <a:r>
+              <a:rPr lang="hu-HU" dirty="0"/>
+              <a:t>/</a:t>
+            </a:r>
+            <a:r>
+              <a:rPr lang="hu-HU" dirty="0" err="1"/>
+              <a:t>Keras</a:t>
+            </a:r>
+            <a:endParaRPr lang="hu-HU" dirty="0"/>
           </a:p>
           <a:p>
             <a:r>
@@ -8828,7 +8994,14 @@
             </a:r>
             <a:r>
               <a:rPr lang="hu-HU" dirty="0"/>
-              <a:t>, 10% teszt és 10% validációs adat</a:t>
+              <a:t>, </a:t>
+            </a:r>
+            <a:br>
+              <a:rPr lang="hu-HU" dirty="0"/>
+            </a:br>
+            <a:r>
+              <a:rPr lang="hu-HU" dirty="0"/>
+              <a:t>10% teszt és 10% validációs adat</a:t>
             </a:r>
           </a:p>
           <a:p>
@@ -8899,6 +9072,53 @@
           </a:p>
         </p:txBody>
       </p:sp>
+      <p:pic>
+        <p:nvPicPr>
+          <p:cNvPr id="2050" name="Picture 2" descr="Architecture of EfficientNet-B0 with MBConv as Basic building blocks |  Download Scientific Diagram">
+            <a:extLst>
+              <a:ext uri="{FF2B5EF4-FFF2-40B4-BE49-F238E27FC236}">
+                <a16:creationId xmlns:a16="http://schemas.microsoft.com/office/drawing/2014/main" id="{8590489B-1103-ADB2-5C18-4B91CE9096C5}"/>
+              </a:ext>
+            </a:extLst>
+          </p:cNvPr>
+          <p:cNvPicPr>
+            <a:picLocks noChangeAspect="1" noChangeArrowheads="1"/>
+          </p:cNvPicPr>
+          <p:nvPr/>
+        </p:nvPicPr>
+        <p:blipFill>
+          <a:blip r:embed="rId2">
+            <a:extLst>
+              <a:ext uri="{28A0092B-C50C-407E-A947-70E740481C1C}">
+                <a14:useLocalDpi xmlns:a14="http://schemas.microsoft.com/office/drawing/2010/main" val="0"/>
+              </a:ext>
+            </a:extLst>
+          </a:blip>
+          <a:srcRect/>
+          <a:stretch>
+            <a:fillRect/>
+          </a:stretch>
+        </p:blipFill>
+        <p:spPr bwMode="auto">
+          <a:xfrm>
+            <a:off x="5773880" y="3990159"/>
+            <a:ext cx="5579919" cy="2527375"/>
+          </a:xfrm>
+          <a:prstGeom prst="rect">
+            <a:avLst/>
+          </a:prstGeom>
+          <a:noFill/>
+          <a:extLst>
+            <a:ext uri="{909E8E84-426E-40DD-AFC4-6F175D3DCCD1}">
+              <a14:hiddenFill xmlns:a14="http://schemas.microsoft.com/office/drawing/2010/main">
+                <a:solidFill>
+                  <a:srgbClr val="FFFFFF"/>
+                </a:solidFill>
+              </a14:hiddenFill>
+            </a:ext>
+          </a:extLst>
+        </p:spPr>
+      </p:pic>
     </p:spTree>
     <p:extLst>
       <p:ext uri="{BB962C8B-B14F-4D97-AF65-F5344CB8AC3E}">
